--- a/parking_controller .pptx
+++ b/parking_controller .pptx
@@ -17,6 +17,7 @@
     <p:sldId id="262" r:id="rId11"/>
     <p:sldId id="263" r:id="rId12"/>
     <p:sldId id="264" r:id="rId13"/>
+    <p:sldId id="265" r:id="rId14"/>
   </p:sldIdLst>
   <p:sldSz cy="5143500" cx="9144000"/>
   <p:notesSz cx="5143500" cy="9144000"/>
@@ -251,7 +252,7 @@
   </p:defaultTextStyle>
   <p:extLst>
     <p:ext uri="GoogleSlidesCustomDataVersion2">
-      <go:slidesCustomData xmlns:go="http://customooxmlschemas.google.com/" r:id="rId14" roundtripDataSignature="AMtx7mioEIjuxsPBK1XZWVXEcTB0TpoOGw=="/>
+      <go:slidesCustomData xmlns:go="http://customooxmlschemas.google.com/" r:id="rId15" roundtripDataSignature="AMtx7mhlq9C0nRWtX6CSa5QUnsYSEITlrA=="/>
     </p:ext>
   </p:extLst>
 </p:presentation>
@@ -1565,6 +1566,149 @@
               <a:spcAft>
                 <a:spcPts val="0"/>
               </a:spcAft>
+              <a:buNone/>
+            </a:pPr>
+            <a:fld id="{00000000-1234-1234-1234-123412341234}" type="slidenum">
+              <a:rPr lang="en-US"/>
+              <a:t>‹#›</a:t>
+            </a:fld>
+            <a:endParaRPr/>
+          </a:p>
+        </p:txBody>
+      </p:sp>
+    </p:spTree>
+  </p:cSld>
+  <p:clrMapOvr>
+    <a:masterClrMapping/>
+  </p:clrMapOvr>
+</p:notes>
+</file>
+
+<file path=ppt/notesSlides/notesSlide10.xml><?xml version="1.0" encoding="utf-8"?>
+<p:notes xmlns:a="http://schemas.openxmlformats.org/drawingml/2006/main" xmlns:r="http://schemas.openxmlformats.org/officeDocument/2006/relationships" xmlns:mc="http://schemas.openxmlformats.org/markup-compatibility/2006" xmlns:mv="urn:schemas-microsoft-com:mac:vml" xmlns:p="http://schemas.openxmlformats.org/presentationml/2006/main" xmlns:c="http://schemas.openxmlformats.org/drawingml/2006/chart" xmlns:dgm="http://schemas.openxmlformats.org/drawingml/2006/diagram" xmlns:o="urn:schemas-microsoft-com:office:office" xmlns:v="urn:schemas-microsoft-com:vml" xmlns:pvml="urn:schemas-microsoft-com:office:powerpoint" xmlns:com="http://schemas.openxmlformats.org/drawingml/2006/compatibility" xmlns:p14="http://schemas.microsoft.com/office/powerpoint/2010/main" xmlns:p15="http://schemas.microsoft.com/office/powerpoint/2012/main" xmlns:ahyp="http://schemas.microsoft.com/office/drawing/2018/hyperlinkcolor" showMasterPhAnim="0" showMasterSp="0">
+  <p:cSld>
+    <p:spTree>
+      <p:nvGrpSpPr>
+        <p:cNvPr id="343" name="Shape 343"/>
+        <p:cNvGrpSpPr/>
+        <p:nvPr/>
+      </p:nvGrpSpPr>
+      <p:grpSpPr>
+        <a:xfrm>
+          <a:off x="0" y="0"/>
+          <a:ext cx="0" cy="0"/>
+          <a:chOff x="0" y="0"/>
+          <a:chExt cx="0" cy="0"/>
+        </a:xfrm>
+      </p:grpSpPr>
+      <p:sp>
+        <p:nvSpPr>
+          <p:cNvPr id="344" name="Google Shape;344;g3f0326eaa19_0_163:notes"/>
+          <p:cNvSpPr/>
+          <p:nvPr>
+            <p:ph idx="2" type="sldImg"/>
+          </p:nvPr>
+        </p:nvSpPr>
+        <p:spPr>
+          <a:xfrm>
+            <a:off x="685800" y="1143000"/>
+            <a:ext cx="5486400" cy="3086100"/>
+          </a:xfrm>
+          <a:custGeom>
+            <a:rect b="b" l="l" r="r" t="t"/>
+            <a:pathLst>
+              <a:path extrusionOk="0" h="120000" w="120000">
+                <a:moveTo>
+                  <a:pt x="0" y="0"/>
+                </a:moveTo>
+                <a:lnTo>
+                  <a:pt x="120000" y="0"/>
+                </a:lnTo>
+                <a:lnTo>
+                  <a:pt x="120000" y="120000"/>
+                </a:lnTo>
+                <a:lnTo>
+                  <a:pt x="0" y="120000"/>
+                </a:lnTo>
+                <a:close/>
+              </a:path>
+            </a:pathLst>
+          </a:custGeom>
+        </p:spPr>
+      </p:sp>
+      <p:sp>
+        <p:nvSpPr>
+          <p:cNvPr id="345" name="Google Shape;345;g3f0326eaa19_0_163:notes"/>
+          <p:cNvSpPr txBox="1"/>
+          <p:nvPr>
+            <p:ph idx="1" type="body"/>
+          </p:nvPr>
+        </p:nvSpPr>
+        <p:spPr>
+          <a:xfrm>
+            <a:off x="685800" y="4400550"/>
+            <a:ext cx="5486400" cy="3600600"/>
+          </a:xfrm>
+          <a:prstGeom prst="rect">
+            <a:avLst/>
+          </a:prstGeom>
+        </p:spPr>
+        <p:txBody>
+          <a:bodyPr anchorCtr="0" anchor="t" bIns="45700" lIns="91425" spcFirstLastPara="1" rIns="91425" wrap="square" tIns="45700">
+            <a:noAutofit/>
+          </a:bodyPr>
+          <a:lstStyle/>
+          <a:p>
+            <a:pPr indent="0" lvl="0" marL="0" rtl="0" algn="l">
+              <a:spcBef>
+                <a:spcPts val="0"/>
+              </a:spcBef>
+              <a:spcAft>
+                <a:spcPts val="0"/>
+              </a:spcAft>
+              <a:buNone/>
+            </a:pPr>
+            <a:r>
+              <a:t/>
+            </a:r>
+            <a:endParaRPr/>
+          </a:p>
+        </p:txBody>
+      </p:sp>
+      <p:sp>
+        <p:nvSpPr>
+          <p:cNvPr id="346" name="Google Shape;346;g3f0326eaa19_0_163:notes"/>
+          <p:cNvSpPr txBox="1"/>
+          <p:nvPr>
+            <p:ph idx="12" type="sldNum"/>
+          </p:nvPr>
+        </p:nvSpPr>
+        <p:spPr>
+          <a:xfrm>
+            <a:off x="3884613" y="8685213"/>
+            <a:ext cx="2971800" cy="458700"/>
+          </a:xfrm>
+          <a:prstGeom prst="rect">
+            <a:avLst/>
+          </a:prstGeom>
+        </p:spPr>
+        <p:txBody>
+          <a:bodyPr anchorCtr="0" anchor="b" bIns="45700" lIns="91425" spcFirstLastPara="1" rIns="91425" wrap="square" tIns="45700">
+            <a:noAutofit/>
+          </a:bodyPr>
+          <a:lstStyle/>
+          <a:p>
+            <a:pPr indent="0" lvl="0" marL="0" rtl="0" algn="r">
+              <a:spcBef>
+                <a:spcPts val="0"/>
+              </a:spcBef>
+              <a:spcAft>
+                <a:spcPts val="0"/>
+              </a:spcAft>
+              <a:buClr>
+                <a:srgbClr val="000000"/>
+              </a:buClr>
+              <a:buFont typeface="Arial"/>
               <a:buNone/>
             </a:pPr>
             <a:fld id="{00000000-1234-1234-1234-123412341234}" type="slidenum">
@@ -4888,6 +5032,577 @@
 </p:sld>
 </file>
 
+<file path=ppt/slides/slide10.xml><?xml version="1.0" encoding="utf-8"?>
+<p:sld xmlns:a="http://schemas.openxmlformats.org/drawingml/2006/main" xmlns:r="http://schemas.openxmlformats.org/officeDocument/2006/relationships" xmlns:mc="http://schemas.openxmlformats.org/markup-compatibility/2006" xmlns:mv="urn:schemas-microsoft-com:mac:vml" xmlns:p="http://schemas.openxmlformats.org/presentationml/2006/main" xmlns:c="http://schemas.openxmlformats.org/drawingml/2006/chart" xmlns:dgm="http://schemas.openxmlformats.org/drawingml/2006/diagram" xmlns:o="urn:schemas-microsoft-com:office:office" xmlns:v="urn:schemas-microsoft-com:vml" xmlns:pvml="urn:schemas-microsoft-com:office:powerpoint" xmlns:com="http://schemas.openxmlformats.org/drawingml/2006/compatibility" xmlns:p14="http://schemas.microsoft.com/office/powerpoint/2010/main" xmlns:p15="http://schemas.microsoft.com/office/powerpoint/2012/main" xmlns:ahyp="http://schemas.microsoft.com/office/drawing/2018/hyperlinkcolor">
+  <p:cSld>
+    <p:spTree>
+      <p:nvGrpSpPr>
+        <p:cNvPr id="347" name="Shape 347"/>
+        <p:cNvGrpSpPr/>
+        <p:nvPr/>
+      </p:nvGrpSpPr>
+      <p:grpSpPr>
+        <a:xfrm>
+          <a:off x="0" y="0"/>
+          <a:ext cx="0" cy="0"/>
+          <a:chOff x="0" y="0"/>
+          <a:chExt cx="0" cy="0"/>
+        </a:xfrm>
+      </p:grpSpPr>
+      <p:sp>
+        <p:nvSpPr>
+          <p:cNvPr id="348" name="Google Shape;348;g3f0326eaa19_0_163"/>
+          <p:cNvSpPr/>
+          <p:nvPr/>
+        </p:nvSpPr>
+        <p:spPr>
+          <a:xfrm>
+            <a:off x="548640" y="274320"/>
+            <a:ext cx="8046600" cy="548700"/>
+          </a:xfrm>
+          <a:prstGeom prst="rect">
+            <a:avLst/>
+          </a:prstGeom>
+          <a:noFill/>
+          <a:ln>
+            <a:noFill/>
+          </a:ln>
+        </p:spPr>
+        <p:txBody>
+          <a:bodyPr anchorCtr="0" anchor="ctr" bIns="45700" lIns="91425" spcFirstLastPara="1" rIns="91425" wrap="square" tIns="45700">
+            <a:noAutofit/>
+          </a:bodyPr>
+          <a:lstStyle/>
+          <a:p>
+            <a:pPr indent="0" lvl="0" marL="0" marR="0" rtl="0" algn="l">
+              <a:lnSpc>
+                <a:spcPct val="100000"/>
+              </a:lnSpc>
+              <a:spcBef>
+                <a:spcPts val="0"/>
+              </a:spcBef>
+              <a:spcAft>
+                <a:spcPts val="0"/>
+              </a:spcAft>
+              <a:buClr>
+                <a:srgbClr val="1B2A4A"/>
+              </a:buClr>
+              <a:buSzPts val="2800"/>
+              <a:buFont typeface="Cambria"/>
+              <a:buNone/>
+            </a:pPr>
+            <a:r>
+              <a:rPr b="1" i="0" lang="en-US" sz="2800" u="none" cap="none" strike="noStrike">
+                <a:solidFill>
+                  <a:srgbClr val="1B2A4A"/>
+                </a:solidFill>
+                <a:latin typeface="Cambria"/>
+                <a:ea typeface="Cambria"/>
+                <a:cs typeface="Cambria"/>
+                <a:sym typeface="Cambria"/>
+              </a:rPr>
+              <a:t>Full Schematic &amp; PCB Design</a:t>
+            </a:r>
+            <a:endParaRPr b="0" i="0" sz="2800" u="none" cap="none" strike="noStrike">
+              <a:solidFill>
+                <a:srgbClr val="000000"/>
+              </a:solidFill>
+              <a:latin typeface="Calibri"/>
+              <a:ea typeface="Calibri"/>
+              <a:cs typeface="Calibri"/>
+              <a:sym typeface="Calibri"/>
+            </a:endParaRPr>
+          </a:p>
+        </p:txBody>
+      </p:sp>
+      <p:sp>
+        <p:nvSpPr>
+          <p:cNvPr id="349" name="Google Shape;349;g3f0326eaa19_0_163"/>
+          <p:cNvSpPr txBox="1"/>
+          <p:nvPr/>
+        </p:nvSpPr>
+        <p:spPr>
+          <a:xfrm>
+            <a:off x="457200" y="1250000"/>
+            <a:ext cx="4039800" cy="230100"/>
+          </a:xfrm>
+          <a:prstGeom prst="rect">
+            <a:avLst/>
+          </a:prstGeom>
+          <a:noFill/>
+          <a:ln>
+            <a:noFill/>
+          </a:ln>
+        </p:spPr>
+        <p:txBody>
+          <a:bodyPr anchorCtr="0" anchor="b" bIns="45700" lIns="91425" spcFirstLastPara="1" rIns="91425" wrap="square" tIns="45700">
+            <a:noAutofit/>
+          </a:bodyPr>
+          <a:lstStyle/>
+          <a:p>
+            <a:pPr indent="0" lvl="0" marL="0" marR="0" rtl="0" algn="l">
+              <a:lnSpc>
+                <a:spcPct val="100000"/>
+              </a:lnSpc>
+              <a:spcBef>
+                <a:spcPts val="0"/>
+              </a:spcBef>
+              <a:spcAft>
+                <a:spcPts val="0"/>
+              </a:spcAft>
+              <a:buClr>
+                <a:srgbClr val="000000"/>
+              </a:buClr>
+              <a:buSzPts val="1100"/>
+              <a:buFont typeface="Arial"/>
+              <a:buNone/>
+            </a:pPr>
+            <a:r>
+              <a:rPr b="1" i="0" lang="en-US" sz="1100" u="none" cap="none" strike="noStrike">
+                <a:solidFill>
+                  <a:srgbClr val="1B2A4A"/>
+                </a:solidFill>
+                <a:latin typeface="Calibri"/>
+                <a:ea typeface="Calibri"/>
+                <a:cs typeface="Calibri"/>
+                <a:sym typeface="Calibri"/>
+              </a:rPr>
+              <a:t>FPGA I/O Banks &amp; Power Schematic</a:t>
+            </a:r>
+            <a:endParaRPr/>
+          </a:p>
+        </p:txBody>
+      </p:sp>
+      <p:pic>
+        <p:nvPicPr>
+          <p:cNvPr id="350" name="Google Shape;350;g3f0326eaa19_0_163" title="sch_banks.png"/>
+          <p:cNvPicPr preferRelativeResize="0"/>
+          <p:nvPr/>
+        </p:nvPicPr>
+        <p:blipFill rotWithShape="1">
+          <a:blip r:embed="rId3">
+            <a:alphaModFix/>
+          </a:blip>
+          <a:srcRect b="0" l="0" r="0" t="0"/>
+          <a:stretch/>
+        </p:blipFill>
+        <p:spPr>
+          <a:xfrm>
+            <a:off x="1293320" y="1480000"/>
+            <a:ext cx="2367560" cy="1570000"/>
+          </a:xfrm>
+          <a:prstGeom prst="rect">
+            <a:avLst/>
+          </a:prstGeom>
+          <a:noFill/>
+          <a:ln cap="flat" cmpd="sng" w="9525">
+            <a:solidFill>
+              <a:srgbClr val="D9DEE5"/>
+            </a:solidFill>
+            <a:prstDash val="solid"/>
+            <a:round/>
+            <a:headEnd len="sm" w="sm" type="none"/>
+            <a:tailEnd len="sm" w="sm" type="none"/>
+          </a:ln>
+        </p:spPr>
+      </p:pic>
+      <p:sp>
+        <p:nvSpPr>
+          <p:cNvPr id="351" name="Google Shape;351;g3f0326eaa19_0_163"/>
+          <p:cNvSpPr txBox="1"/>
+          <p:nvPr/>
+        </p:nvSpPr>
+        <p:spPr>
+          <a:xfrm>
+            <a:off x="4647000" y="1250000"/>
+            <a:ext cx="4039800" cy="230100"/>
+          </a:xfrm>
+          <a:prstGeom prst="rect">
+            <a:avLst/>
+          </a:prstGeom>
+          <a:noFill/>
+          <a:ln>
+            <a:noFill/>
+          </a:ln>
+        </p:spPr>
+        <p:txBody>
+          <a:bodyPr anchorCtr="0" anchor="b" bIns="45700" lIns="91425" spcFirstLastPara="1" rIns="91425" wrap="square" tIns="45700">
+            <a:noAutofit/>
+          </a:bodyPr>
+          <a:lstStyle/>
+          <a:p>
+            <a:pPr indent="0" lvl="0" marL="0" marR="0" rtl="0" algn="l">
+              <a:lnSpc>
+                <a:spcPct val="100000"/>
+              </a:lnSpc>
+              <a:spcBef>
+                <a:spcPts val="0"/>
+              </a:spcBef>
+              <a:spcAft>
+                <a:spcPts val="0"/>
+              </a:spcAft>
+              <a:buClr>
+                <a:srgbClr val="000000"/>
+              </a:buClr>
+              <a:buSzPts val="1100"/>
+              <a:buFont typeface="Arial"/>
+              <a:buNone/>
+            </a:pPr>
+            <a:r>
+              <a:rPr b="1" i="0" lang="en-US" sz="1100" u="none" cap="none" strike="noStrike">
+                <a:solidFill>
+                  <a:srgbClr val="1B2A4A"/>
+                </a:solidFill>
+                <a:latin typeface="Calibri"/>
+                <a:ea typeface="Calibri"/>
+                <a:cs typeface="Calibri"/>
+                <a:sym typeface="Calibri"/>
+              </a:rPr>
+              <a:t>Parking System Schematic (Buttons, LEDs, Display)</a:t>
+            </a:r>
+            <a:endParaRPr/>
+          </a:p>
+        </p:txBody>
+      </p:sp>
+      <p:pic>
+        <p:nvPicPr>
+          <p:cNvPr id="352" name="Google Shape;352;g3f0326eaa19_0_163" title="sch_parking.png"/>
+          <p:cNvPicPr preferRelativeResize="0"/>
+          <p:nvPr/>
+        </p:nvPicPr>
+        <p:blipFill rotWithShape="1">
+          <a:blip r:embed="rId4">
+            <a:alphaModFix/>
+          </a:blip>
+          <a:srcRect b="0" l="0" r="0" t="0"/>
+          <a:stretch/>
+        </p:blipFill>
+        <p:spPr>
+          <a:xfrm>
+            <a:off x="5431310" y="1480000"/>
+            <a:ext cx="2471180" cy="1569999"/>
+          </a:xfrm>
+          <a:prstGeom prst="rect">
+            <a:avLst/>
+          </a:prstGeom>
+          <a:noFill/>
+          <a:ln cap="flat" cmpd="sng" w="9525">
+            <a:solidFill>
+              <a:srgbClr val="D9DEE5"/>
+            </a:solidFill>
+            <a:prstDash val="solid"/>
+            <a:round/>
+            <a:headEnd len="sm" w="sm" type="none"/>
+            <a:tailEnd len="sm" w="sm" type="none"/>
+          </a:ln>
+        </p:spPr>
+      </p:pic>
+      <p:sp>
+        <p:nvSpPr>
+          <p:cNvPr id="353" name="Google Shape;353;g3f0326eaa19_0_163"/>
+          <p:cNvSpPr txBox="1"/>
+          <p:nvPr/>
+        </p:nvSpPr>
+        <p:spPr>
+          <a:xfrm>
+            <a:off x="457200" y="3200000"/>
+            <a:ext cx="4039800" cy="230100"/>
+          </a:xfrm>
+          <a:prstGeom prst="rect">
+            <a:avLst/>
+          </a:prstGeom>
+          <a:noFill/>
+          <a:ln>
+            <a:noFill/>
+          </a:ln>
+        </p:spPr>
+        <p:txBody>
+          <a:bodyPr anchorCtr="0" anchor="b" bIns="45700" lIns="91425" spcFirstLastPara="1" rIns="91425" wrap="square" tIns="45700">
+            <a:noAutofit/>
+          </a:bodyPr>
+          <a:lstStyle/>
+          <a:p>
+            <a:pPr indent="0" lvl="0" marL="0" marR="0" rtl="0" algn="l">
+              <a:lnSpc>
+                <a:spcPct val="100000"/>
+              </a:lnSpc>
+              <a:spcBef>
+                <a:spcPts val="0"/>
+              </a:spcBef>
+              <a:spcAft>
+                <a:spcPts val="0"/>
+              </a:spcAft>
+              <a:buClr>
+                <a:srgbClr val="000000"/>
+              </a:buClr>
+              <a:buSzPts val="1100"/>
+              <a:buFont typeface="Arial"/>
+              <a:buNone/>
+            </a:pPr>
+            <a:r>
+              <a:rPr b="1" lang="en-US" sz="1100">
+                <a:solidFill>
+                  <a:srgbClr val="1B2A4A"/>
+                </a:solidFill>
+                <a:latin typeface="Calibri"/>
+                <a:ea typeface="Calibri"/>
+                <a:cs typeface="Calibri"/>
+                <a:sym typeface="Calibri"/>
+              </a:rPr>
+              <a:t>PCB Design</a:t>
+            </a:r>
+            <a:endParaRPr/>
+          </a:p>
+        </p:txBody>
+      </p:sp>
+      <p:sp>
+        <p:nvSpPr>
+          <p:cNvPr id="354" name="Google Shape;354;g3f0326eaa19_0_163"/>
+          <p:cNvSpPr txBox="1"/>
+          <p:nvPr/>
+        </p:nvSpPr>
+        <p:spPr>
+          <a:xfrm>
+            <a:off x="4647000" y="3200000"/>
+            <a:ext cx="4039800" cy="230100"/>
+          </a:xfrm>
+          <a:prstGeom prst="rect">
+            <a:avLst/>
+          </a:prstGeom>
+          <a:noFill/>
+          <a:ln>
+            <a:noFill/>
+          </a:ln>
+        </p:spPr>
+        <p:txBody>
+          <a:bodyPr anchorCtr="0" anchor="b" bIns="45700" lIns="91425" spcFirstLastPara="1" rIns="91425" wrap="square" tIns="45700">
+            <a:noAutofit/>
+          </a:bodyPr>
+          <a:lstStyle/>
+          <a:p>
+            <a:pPr indent="0" lvl="0" marL="0" marR="0" rtl="0" algn="l">
+              <a:lnSpc>
+                <a:spcPct val="100000"/>
+              </a:lnSpc>
+              <a:spcBef>
+                <a:spcPts val="0"/>
+              </a:spcBef>
+              <a:spcAft>
+                <a:spcPts val="0"/>
+              </a:spcAft>
+              <a:buClr>
+                <a:srgbClr val="000000"/>
+              </a:buClr>
+              <a:buSzPts val="1100"/>
+              <a:buFont typeface="Arial"/>
+              <a:buNone/>
+            </a:pPr>
+            <a:r>
+              <a:rPr b="1" i="0" lang="en-US" sz="1100" u="none" cap="none" strike="noStrike">
+                <a:solidFill>
+                  <a:srgbClr val="1B2A4A"/>
+                </a:solidFill>
+                <a:latin typeface="Calibri"/>
+                <a:ea typeface="Calibri"/>
+                <a:cs typeface="Calibri"/>
+                <a:sym typeface="Calibri"/>
+              </a:rPr>
+              <a:t>Routed PCB </a:t>
+            </a:r>
+            <a:r>
+              <a:rPr b="1" lang="en-US" sz="1100">
+                <a:solidFill>
+                  <a:srgbClr val="1B2A4A"/>
+                </a:solidFill>
+                <a:latin typeface="Calibri"/>
+                <a:ea typeface="Calibri"/>
+                <a:cs typeface="Calibri"/>
+                <a:sym typeface="Calibri"/>
+              </a:rPr>
+              <a:t>-</a:t>
+            </a:r>
+            <a:r>
+              <a:rPr b="1" i="0" lang="en-US" sz="1100" u="none" cap="none" strike="noStrike">
+                <a:solidFill>
+                  <a:srgbClr val="1B2A4A"/>
+                </a:solidFill>
+                <a:latin typeface="Calibri"/>
+                <a:ea typeface="Calibri"/>
+                <a:cs typeface="Calibri"/>
+                <a:sym typeface="Calibri"/>
+              </a:rPr>
+              <a:t> Altium Designer</a:t>
+            </a:r>
+            <a:endParaRPr/>
+          </a:p>
+        </p:txBody>
+      </p:sp>
+      <p:pic>
+        <p:nvPicPr>
+          <p:cNvPr id="355" name="Google Shape;355;g3f0326eaa19_0_163" title="pcb_routing.png"/>
+          <p:cNvPicPr preferRelativeResize="0"/>
+          <p:nvPr/>
+        </p:nvPicPr>
+        <p:blipFill rotWithShape="1">
+          <a:blip r:embed="rId5">
+            <a:alphaModFix/>
+          </a:blip>
+          <a:srcRect b="0" l="0" r="0" t="0"/>
+          <a:stretch/>
+        </p:blipFill>
+        <p:spPr>
+          <a:xfrm>
+            <a:off x="5489400" y="3430000"/>
+            <a:ext cx="2355000" cy="1570000"/>
+          </a:xfrm>
+          <a:prstGeom prst="rect">
+            <a:avLst/>
+          </a:prstGeom>
+          <a:noFill/>
+          <a:ln cap="flat" cmpd="sng" w="9525">
+            <a:solidFill>
+              <a:srgbClr val="D9DEE5"/>
+            </a:solidFill>
+            <a:prstDash val="solid"/>
+            <a:round/>
+            <a:headEnd len="sm" w="sm" type="none"/>
+            <a:tailEnd len="sm" w="sm" type="none"/>
+          </a:ln>
+        </p:spPr>
+      </p:pic>
+      <p:sp>
+        <p:nvSpPr>
+          <p:cNvPr id="356" name="Google Shape;356;g3f0326eaa19_0_163"/>
+          <p:cNvSpPr txBox="1"/>
+          <p:nvPr/>
+        </p:nvSpPr>
+        <p:spPr>
+          <a:xfrm>
+            <a:off x="687250" y="841675"/>
+            <a:ext cx="6948300" cy="348000"/>
+          </a:xfrm>
+          <a:prstGeom prst="rect">
+            <a:avLst/>
+          </a:prstGeom>
+          <a:noFill/>
+          <a:ln>
+            <a:noFill/>
+          </a:ln>
+        </p:spPr>
+        <p:txBody>
+          <a:bodyPr anchorCtr="0" anchor="t" bIns="91425" lIns="91425" spcFirstLastPara="1" rIns="91425" wrap="square" tIns="91425">
+            <a:noAutofit/>
+          </a:bodyPr>
+          <a:lstStyle/>
+          <a:p>
+            <a:pPr indent="0" lvl="0" marL="0" marR="0" rtl="0" algn="l">
+              <a:lnSpc>
+                <a:spcPct val="100000"/>
+              </a:lnSpc>
+              <a:spcBef>
+                <a:spcPts val="0"/>
+              </a:spcBef>
+              <a:spcAft>
+                <a:spcPts val="0"/>
+              </a:spcAft>
+              <a:buClr>
+                <a:srgbClr val="4A5568"/>
+              </a:buClr>
+              <a:buSzPts val="1300"/>
+              <a:buFont typeface="Calibri"/>
+              <a:buNone/>
+            </a:pPr>
+            <a:r>
+              <a:rPr b="0" i="0" lang="en-US" sz="1300" u="none" cap="none" strike="noStrike">
+                <a:solidFill>
+                  <a:srgbClr val="4A5568"/>
+                </a:solidFill>
+                <a:latin typeface="Calibri"/>
+                <a:ea typeface="Calibri"/>
+                <a:cs typeface="Calibri"/>
+                <a:sym typeface="Calibri"/>
+              </a:rPr>
+              <a:t>Complete circuit schematic and routed board layout, designed in Altium Designer.</a:t>
+            </a:r>
+            <a:endParaRPr b="0" i="0" sz="1300" u="none" cap="none" strike="noStrike">
+              <a:solidFill>
+                <a:srgbClr val="000000"/>
+              </a:solidFill>
+              <a:latin typeface="Calibri"/>
+              <a:ea typeface="Calibri"/>
+              <a:cs typeface="Calibri"/>
+              <a:sym typeface="Calibri"/>
+            </a:endParaRPr>
+          </a:p>
+          <a:p>
+            <a:pPr indent="0" lvl="0" marL="0" marR="0" rtl="0" algn="l">
+              <a:lnSpc>
+                <a:spcPct val="100000"/>
+              </a:lnSpc>
+              <a:spcBef>
+                <a:spcPts val="0"/>
+              </a:spcBef>
+              <a:spcAft>
+                <a:spcPts val="0"/>
+              </a:spcAft>
+              <a:buClr>
+                <a:srgbClr val="000000"/>
+              </a:buClr>
+              <a:buSzPts val="1400"/>
+              <a:buFont typeface="Arial"/>
+              <a:buNone/>
+            </a:pPr>
+            <a:r>
+              <a:t/>
+            </a:r>
+            <a:endParaRPr b="0" i="0" sz="1400" u="none" cap="none" strike="noStrike">
+              <a:solidFill>
+                <a:srgbClr val="000000"/>
+              </a:solidFill>
+              <a:latin typeface="Arial"/>
+              <a:ea typeface="Arial"/>
+              <a:cs typeface="Arial"/>
+              <a:sym typeface="Arial"/>
+            </a:endParaRPr>
+          </a:p>
+        </p:txBody>
+      </p:sp>
+      <p:pic>
+        <p:nvPicPr>
+          <p:cNvPr id="357" name="Google Shape;357;g3f0326eaa19_0_163"/>
+          <p:cNvPicPr preferRelativeResize="0"/>
+          <p:nvPr/>
+        </p:nvPicPr>
+        <p:blipFill>
+          <a:blip r:embed="rId6">
+            <a:alphaModFix/>
+          </a:blip>
+          <a:stretch>
+            <a:fillRect/>
+          </a:stretch>
+        </p:blipFill>
+        <p:spPr>
+          <a:xfrm>
+            <a:off x="1213916" y="3429996"/>
+            <a:ext cx="2361735" cy="1570000"/>
+          </a:xfrm>
+          <a:prstGeom prst="rect">
+            <a:avLst/>
+          </a:prstGeom>
+          <a:noFill/>
+          <a:ln>
+            <a:noFill/>
+          </a:ln>
+        </p:spPr>
+      </p:pic>
+    </p:spTree>
+  </p:cSld>
+  <p:clrMapOvr>
+    <a:masterClrMapping/>
+  </p:clrMapOvr>
+</p:sld>
+</file>
+
 <file path=ppt/slides/slide2.xml><?xml version="1.0" encoding="utf-8"?>
 <p:sld xmlns:a="http://schemas.openxmlformats.org/drawingml/2006/main" xmlns:r="http://schemas.openxmlformats.org/officeDocument/2006/relationships" xmlns:mc="http://schemas.openxmlformats.org/markup-compatibility/2006" xmlns:mv="urn:schemas-microsoft-com:mac:vml" xmlns:p="http://schemas.openxmlformats.org/presentationml/2006/main" xmlns:c="http://schemas.openxmlformats.org/drawingml/2006/chart" xmlns:dgm="http://schemas.openxmlformats.org/drawingml/2006/diagram" xmlns:o="urn:schemas-microsoft-com:office:office" xmlns:v="urn:schemas-microsoft-com:vml" xmlns:pvml="urn:schemas-microsoft-com:office:powerpoint" xmlns:com="http://schemas.openxmlformats.org/drawingml/2006/compatibility" xmlns:p14="http://schemas.microsoft.com/office/powerpoint/2010/main" xmlns:p15="http://schemas.microsoft.com/office/powerpoint/2012/main" xmlns:ahyp="http://schemas.microsoft.com/office/drawing/2018/hyperlinkcolor">
   <p:cSld>
